--- a/governos/GDF/PrintsComprobatorios/GDF-Prints-Comprobatorios.pptx
+++ b/governos/GDF/PrintsComprobatorios/GDF-Prints-Comprobatorios.pptx
@@ -2799,7 +2799,7 @@
         <p:spPr>
           <a:xfrm>
             <a:off x="548640" y="1417320"/>
-            <a:ext cx="8634204" cy="4846320"/>
+            <a:ext cx="8626934" cy="4846320"/>
           </a:xfrm>
           <a:prstGeom prst="rect">
             <a:avLst/>

--- a/governos/GDF/PrintsComprobatorios/GDF-Prints-Comprobatorios.pptx
+++ b/governos/GDF/PrintsComprobatorios/GDF-Prints-Comprobatorios.pptx
@@ -2924,7 +2924,7 @@
         <p:spPr>
           <a:xfrm>
             <a:off x="548640" y="1417320"/>
-            <a:ext cx="8556178" cy="4846320"/>
+            <a:ext cx="8541154" cy="4846320"/>
           </a:xfrm>
           <a:prstGeom prst="rect">
             <a:avLst/>
